--- a/public/fun/pack/pptx/reviewpro/보장점검양식프리미엄_22_부부점검_네온아쿠아.pptx
+++ b/public/fun/pack/pptx/reviewpro/보장점검양식프리미엄_22_부부점검_네온아쿠아.pptx
@@ -112,12 +112,12 @@
   <p:extLst>
     <p:ext uri="{521415D9-36F7-43E2-AB2F-B90AF26B5E84}">
       <p14:sectionLst xmlns:p14="http://schemas.microsoft.com/office/powerpoint/2010/main">
-        <p14:section name="시작" id="{75DF189B-BC99-4488-B50F-D2D595396C97}">
+        <p14:section name="시작" id="{3C2DA632-4F58-4D1D-A198-381AC6DA99B4}">
           <p14:sldIdLst>
             <p14:sldId id="256"/>
           </p14:sldIdLst>
         </p14:section>
-        <p14:section name="본문" id="{C6827E42-ED82-4D41-8F71-9237EEEF9034}">
+        <p14:section name="본문" id="{E637BDB6-E70A-43DB-9325-A220A9D863A8}">
           <p14:sldIdLst>
             <p14:sldId id="257"/>
             <p14:sldId id="258"/>
@@ -2724,7 +2724,7 @@
             </a:lvl1pPr>
           </a:lstStyle>
           <a:p>
-            <a:fld id="{7493B193-3B0C-4169-AF71-652A9BFCAE81}" type="slidenum">
+            <a:fld id="{C306836D-B237-4404-B80B-7CE57C220FDC}" type="slidenum">
               <a:rPr lang="en-US"/>
               <a:t>‹#›</a:t>
             </a:fld>
@@ -4620,7 +4620,7 @@
             </a:lvl1pPr>
           </a:lstStyle>
           <a:p>
-            <a:fld id="{417C9521-8070-4DB7-98A6-E960A44CD6A7}" type="slidenum">
+            <a:fld id="{276DCE85-C6B0-4256-9B64-7620ED67529D}" type="slidenum">
               <a:rPr lang="en-US"/>
               <a:t>‹#›</a:t>
             </a:fld>
@@ -5366,7 +5366,7 @@
             </a:lvl1pPr>
           </a:lstStyle>
           <a:p>
-            <a:fld id="{BE14F955-7FA2-4026-AB0F-D0DD9D19621B}" type="slidenum">
+            <a:fld id="{CFAC718B-0B4A-4397-BED5-175391133D7E}" type="slidenum">
               <a:rPr lang="en-US"/>
               <a:t>‹#›</a:t>
             </a:fld>
@@ -6229,7 +6229,7 @@
           <a:p>
             <a:r>
               <a:rPr lang="ko-KR"/>
-              <a:t>휴가 전에 둘이서 한 시간만 앉아 봅니다</a:t>
+              <a:t>둘이서 한 시간만 앉아 봅니다</a:t>
             </a:r>
           </a:p>
         </p:txBody>
@@ -6251,7 +6251,7 @@
           <a:p>
             <a:r>
               <a:rPr lang="ko-KR"/>
-              <a:t>부부 점검 · 0000. 00. 00</a:t>
+              <a:t>부부 점검 · 날짜 입력</a:t>
             </a:r>
           </a:p>
           <a:p>
@@ -6364,7 +6364,7 @@
           <a:bodyPr/>
           <a:lstStyle/>
           <a:p>
-            <a:fld id="{AA8E84A9-DC11-4D38-B205-60850476408D}" type="slidenum">
+            <a:fld id="{EFBFCED5-67E6-440F-ACF4-DF30EACDB90E}" type="slidenum">
               <a:rPr lang="en-US"/>
               <a:t>‹#›</a:t>
             </a:fld>
@@ -7099,7 +7099,7 @@
           <a:bodyPr/>
           <a:lstStyle/>
           <a:p>
-            <a:fld id="{701F6C37-1691-409A-B84F-310FCBC5296F}" type="slidenum">
+            <a:fld id="{DC2DB0F7-B197-43C3-A67D-89ACF02901FD}" type="slidenum">
               <a:rPr lang="en-US"/>
               <a:t>‹#›</a:t>
             </a:fld>
@@ -8627,7 +8627,7 @@
           <a:bodyPr/>
           <a:lstStyle/>
           <a:p>
-            <a:fld id="{FC770CE7-2041-40EB-AE8C-2E0F63772540}" type="slidenum">
+            <a:fld id="{305535D2-08EB-40FF-80D6-AB6772B94311}" type="slidenum">
               <a:rPr lang="en-US"/>
               <a:t>‹#›</a:t>
             </a:fld>
@@ -10199,7 +10199,7 @@
           <a:bodyPr/>
           <a:lstStyle/>
           <a:p>
-            <a:fld id="{F05ABCF4-27EF-4583-BD7B-3E99C2B718AA}" type="slidenum">
+            <a:fld id="{21AC26F9-66B7-4273-8CAA-5CF25D5E0A1C}" type="slidenum">
               <a:rPr lang="en-US"/>
               <a:t>‹#›</a:t>
             </a:fld>
@@ -11101,7 +11101,7 @@
           <a:bodyPr/>
           <a:lstStyle/>
           <a:p>
-            <a:fld id="{46D40CD5-95E8-4E22-96B9-7BD25AAB5069}" type="slidenum">
+            <a:fld id="{B09B9FDA-6825-49D7-96EA-0B24FFD33CBE}" type="slidenum">
               <a:rPr lang="en-US"/>
               <a:t>‹#›</a:t>
             </a:fld>
